--- a/fixtures/sample-editor-notes.pptx
+++ b/fixtures/sample-editor-notes.pptx
@@ -107,13 +107,47 @@
             </a:r>
           </a:p>
           <a:p>
+            <a:pPr algn="ctr"/>
             <a:r>
-              <a:rPr sz="1200"/>
-              <a:t>来源第二段</a:t>
+              <a:rPr sz="1400"/>
+              <a:t/>
             </a:r>
           </a:p>
-        </p:txBody>
-      </p:sp>
+          <a:p>
+            <a:pPr algn="r"/>
+            <a:r>
+              <a:rPr sz="1800" b="1"/>
+              <a:t>来源第三段</a:t>
+            </a:r>
+          </a:p>
+          <a:p>
+            <a:pPr algn="just"/>
+            <a:endParaRPr sz="1600"/>
+          </a:p>
+        </p:txBody>
+      </p:sp>
+      <p:pic>
+        <p:nvPicPr>
+          <p:cNvPr id="5" name="备注图片"/>
+          <p:cNvPicPr/>
+          <p:nvPr/>
+        </p:nvPicPr>
+        <p:blipFill>
+          <a:blip r:embed="image-ref"/>
+          <a:stretch>
+            <a:fillRect/>
+          </a:stretch>
+        </p:blipFill>
+        <p:spPr>
+          <a:xfrm>
+            <a:off x="0" y="0"/>
+            <a:ext cx="914400" cy="914400"/>
+          </a:xfrm>
+          <a:prstGeom prst="rect">
+            <a:avLst/>
+          </a:prstGeom>
+        </p:spPr>
+      </p:pic>
       <p:sp>
         <p:nvSpPr>
           <p:cNvPr id="3" name="页脚"/>
@@ -275,12 +309,7 @@
         <p:txBody>
           <a:bodyPr/>
           <a:lstStyle/>
-          <a:p>
-            <a:r>
-              <a:rPr sz="1200"/>
-              <a:t>页面 4 的独立备注</a:t>
-            </a:r>
-          </a:p>
+          <a:p/>
         </p:txBody>
       </p:sp>
     </p:spTree>
